--- a/SZE_tantargyi_adatbazis.pptx
+++ b/SZE_tantargyi_adatbazis.pptx
@@ -116,6 +116,11 @@
       </a:defRPr>
     </a:lvl9pPr>
   </p:defaultTextStyle>
+  <p:extLst>
+    <p:ext uri="{EFAFB233-063F-42B5-8137-9DF3F51BA10A}">
+      <p15:sldGuideLst xmlns:p15="http://schemas.microsoft.com/office/powerpoint/2012/main"/>
+    </p:ext>
+  </p:extLst>
 </p:presentation>
 </file>
 
@@ -266,7 +271,7 @@
           <a:p>
             <a:fld id="{EDB52E5A-450B-4633-84DA-5A467F6E8A84}" type="datetimeFigureOut">
               <a:rPr lang="hu-HU" smtClean="0"/>
-              <a:t>2024. 12. 07.</a:t>
+              <a:t>2024. 12. 09.</a:t>
             </a:fld>
             <a:endParaRPr lang="hu-HU"/>
           </a:p>
@@ -464,7 +469,7 @@
           <a:p>
             <a:fld id="{EDB52E5A-450B-4633-84DA-5A467F6E8A84}" type="datetimeFigureOut">
               <a:rPr lang="hu-HU" smtClean="0"/>
-              <a:t>2024. 12. 07.</a:t>
+              <a:t>2024. 12. 09.</a:t>
             </a:fld>
             <a:endParaRPr lang="hu-HU"/>
           </a:p>
@@ -672,7 +677,7 @@
           <a:p>
             <a:fld id="{EDB52E5A-450B-4633-84DA-5A467F6E8A84}" type="datetimeFigureOut">
               <a:rPr lang="hu-HU" smtClean="0"/>
-              <a:t>2024. 12. 07.</a:t>
+              <a:t>2024. 12. 09.</a:t>
             </a:fld>
             <a:endParaRPr lang="hu-HU"/>
           </a:p>
@@ -870,7 +875,7 @@
           <a:p>
             <a:fld id="{EDB52E5A-450B-4633-84DA-5A467F6E8A84}" type="datetimeFigureOut">
               <a:rPr lang="hu-HU" smtClean="0"/>
-              <a:t>2024. 12. 07.</a:t>
+              <a:t>2024. 12. 09.</a:t>
             </a:fld>
             <a:endParaRPr lang="hu-HU"/>
           </a:p>
@@ -1145,7 +1150,7 @@
           <a:p>
             <a:fld id="{EDB52E5A-450B-4633-84DA-5A467F6E8A84}" type="datetimeFigureOut">
               <a:rPr lang="hu-HU" smtClean="0"/>
-              <a:t>2024. 12. 07.</a:t>
+              <a:t>2024. 12. 09.</a:t>
             </a:fld>
             <a:endParaRPr lang="hu-HU"/>
           </a:p>
@@ -1410,7 +1415,7 @@
           <a:p>
             <a:fld id="{EDB52E5A-450B-4633-84DA-5A467F6E8A84}" type="datetimeFigureOut">
               <a:rPr lang="hu-HU" smtClean="0"/>
-              <a:t>2024. 12. 07.</a:t>
+              <a:t>2024. 12. 09.</a:t>
             </a:fld>
             <a:endParaRPr lang="hu-HU"/>
           </a:p>
@@ -1822,7 +1827,7 @@
           <a:p>
             <a:fld id="{EDB52E5A-450B-4633-84DA-5A467F6E8A84}" type="datetimeFigureOut">
               <a:rPr lang="hu-HU" smtClean="0"/>
-              <a:t>2024. 12. 07.</a:t>
+              <a:t>2024. 12. 09.</a:t>
             </a:fld>
             <a:endParaRPr lang="hu-HU"/>
           </a:p>
@@ -1963,7 +1968,7 @@
           <a:p>
             <a:fld id="{EDB52E5A-450B-4633-84DA-5A467F6E8A84}" type="datetimeFigureOut">
               <a:rPr lang="hu-HU" smtClean="0"/>
-              <a:t>2024. 12. 07.</a:t>
+              <a:t>2024. 12. 09.</a:t>
             </a:fld>
             <a:endParaRPr lang="hu-HU"/>
           </a:p>
@@ -2076,7 +2081,7 @@
           <a:p>
             <a:fld id="{EDB52E5A-450B-4633-84DA-5A467F6E8A84}" type="datetimeFigureOut">
               <a:rPr lang="hu-HU" smtClean="0"/>
-              <a:t>2024. 12. 07.</a:t>
+              <a:t>2024. 12. 09.</a:t>
             </a:fld>
             <a:endParaRPr lang="hu-HU"/>
           </a:p>
@@ -2387,7 +2392,7 @@
           <a:p>
             <a:fld id="{EDB52E5A-450B-4633-84DA-5A467F6E8A84}" type="datetimeFigureOut">
               <a:rPr lang="hu-HU" smtClean="0"/>
-              <a:t>2024. 12. 07.</a:t>
+              <a:t>2024. 12. 09.</a:t>
             </a:fld>
             <a:endParaRPr lang="hu-HU"/>
           </a:p>
@@ -2675,7 +2680,7 @@
           <a:p>
             <a:fld id="{EDB52E5A-450B-4633-84DA-5A467F6E8A84}" type="datetimeFigureOut">
               <a:rPr lang="hu-HU" smtClean="0"/>
-              <a:t>2024. 12. 07.</a:t>
+              <a:t>2024. 12. 09.</a:t>
             </a:fld>
             <a:endParaRPr lang="hu-HU"/>
           </a:p>
@@ -2916,7 +2921,7 @@
           <a:p>
             <a:fld id="{EDB52E5A-450B-4633-84DA-5A467F6E8A84}" type="datetimeFigureOut">
               <a:rPr lang="hu-HU" smtClean="0"/>
-              <a:t>2024. 12. 07.</a:t>
+              <a:t>2024. 12. 09.</a:t>
             </a:fld>
             <a:endParaRPr lang="hu-HU"/>
           </a:p>
@@ -5206,7 +5211,7 @@
         </p:nvSpPr>
         <p:spPr>
           <a:xfrm>
-            <a:off x="790575" y="2171700"/>
+            <a:off x="590550" y="2171700"/>
             <a:ext cx="4953000" cy="3390900"/>
           </a:xfrm>
           <a:prstGeom prst="rect">
@@ -5314,8 +5319,8 @@
         </p:nvSpPr>
         <p:spPr>
           <a:xfrm>
-            <a:off x="1362075" y="5664755"/>
-            <a:ext cx="3248025" cy="369332"/>
+            <a:off x="2095500" y="5698092"/>
+            <a:ext cx="1943100" cy="369332"/>
           </a:xfrm>
           <a:prstGeom prst="rect">
             <a:avLst/>
@@ -5328,19 +5333,84 @@
           </a:bodyPr>
           <a:lstStyle/>
           <a:p>
-            <a:r>
-              <a:rPr lang="hu-HU" dirty="0"/>
-              <a:t>Kép leírás</a:t>
-            </a:r>
-          </a:p>
-        </p:txBody>
-      </p:sp>
-      <p:sp>
-        <p:nvSpPr>
-          <p:cNvPr id="7" name="Szövegdoboz 6">
-            <a:extLst>
-              <a:ext uri="{FF2B5EF4-FFF2-40B4-BE49-F238E27FC236}">
-                <a16:creationId xmlns:a16="http://schemas.microsoft.com/office/drawing/2014/main" id="{726CECE5-E426-F45C-DB53-E7A126311249}"/>
+            <a:pPr algn="ctr"/>
+            <a:r>
+              <a:rPr lang="hu-HU" dirty="0">
+                <a:solidFill>
+                  <a:schemeClr val="bg1"/>
+                </a:solidFill>
+              </a:rPr>
+              <a:t>Fórum Főoldal</a:t>
+            </a:r>
+          </a:p>
+        </p:txBody>
+      </p:sp>
+      <p:pic>
+        <p:nvPicPr>
+          <p:cNvPr id="8" name="Kép 7">
+            <a:extLst>
+              <a:ext uri="{FF2B5EF4-FFF2-40B4-BE49-F238E27FC236}">
+                <a16:creationId xmlns:a16="http://schemas.microsoft.com/office/drawing/2014/main" id="{6E2E372D-2F1B-1937-8AF0-3C6075172A96}"/>
+              </a:ext>
+            </a:extLst>
+          </p:cNvPr>
+          <p:cNvPicPr>
+            <a:picLocks noChangeAspect="1"/>
+          </p:cNvPicPr>
+          <p:nvPr/>
+        </p:nvPicPr>
+        <p:blipFill>
+          <a:blip r:embed="rId2"/>
+          <a:stretch>
+            <a:fillRect/>
+          </a:stretch>
+        </p:blipFill>
+        <p:spPr>
+          <a:xfrm>
+            <a:off x="353320" y="1581149"/>
+            <a:ext cx="5390255" cy="4083605"/>
+          </a:xfrm>
+          <a:prstGeom prst="rect">
+            <a:avLst/>
+          </a:prstGeom>
+        </p:spPr>
+      </p:pic>
+      <p:pic>
+        <p:nvPicPr>
+          <p:cNvPr id="10" name="Kép 9">
+            <a:extLst>
+              <a:ext uri="{FF2B5EF4-FFF2-40B4-BE49-F238E27FC236}">
+                <a16:creationId xmlns:a16="http://schemas.microsoft.com/office/drawing/2014/main" id="{E9ADA9F7-3A77-97A1-7D57-D0D801AA15DA}"/>
+              </a:ext>
+            </a:extLst>
+          </p:cNvPr>
+          <p:cNvPicPr>
+            <a:picLocks noChangeAspect="1"/>
+          </p:cNvPicPr>
+          <p:nvPr/>
+        </p:nvPicPr>
+        <p:blipFill>
+          <a:blip r:embed="rId3"/>
+          <a:stretch>
+            <a:fillRect/>
+          </a:stretch>
+        </p:blipFill>
+        <p:spPr>
+          <a:xfrm>
+            <a:off x="6114421" y="1581149"/>
+            <a:ext cx="5724259" cy="4083605"/>
+          </a:xfrm>
+          <a:prstGeom prst="rect">
+            <a:avLst/>
+          </a:prstGeom>
+        </p:spPr>
+      </p:pic>
+      <p:sp>
+        <p:nvSpPr>
+          <p:cNvPr id="11" name="Szövegdoboz 10">
+            <a:extLst>
+              <a:ext uri="{FF2B5EF4-FFF2-40B4-BE49-F238E27FC236}">
+                <a16:creationId xmlns:a16="http://schemas.microsoft.com/office/drawing/2014/main" id="{860FD991-4C75-6F3B-48A1-9F7C07D0B1EB}"/>
               </a:ext>
             </a:extLst>
           </p:cNvPr>
@@ -5349,8 +5419,8 @@
         </p:nvSpPr>
         <p:spPr>
           <a:xfrm>
-            <a:off x="6896100" y="5664755"/>
-            <a:ext cx="3248025" cy="369332"/>
+            <a:off x="7953375" y="5698092"/>
+            <a:ext cx="2038350" cy="646331"/>
           </a:xfrm>
           <a:prstGeom prst="rect">
             <a:avLst/>
@@ -5363,9 +5433,14 @@
           </a:bodyPr>
           <a:lstStyle/>
           <a:p>
-            <a:r>
-              <a:rPr lang="hu-HU" dirty="0"/>
-              <a:t>Kép leírás</a:t>
+            <a:pPr algn="ctr"/>
+            <a:r>
+              <a:rPr lang="hu-HU" dirty="0">
+                <a:solidFill>
+                  <a:schemeClr val="bg1"/>
+                </a:solidFill>
+              </a:rPr>
+              <a:t>Szakok nézete a GIVK tekintetében</a:t>
             </a:r>
           </a:p>
         </p:txBody>
@@ -5431,7 +5506,7 @@
         </p:nvSpPr>
         <p:spPr>
           <a:xfrm>
-            <a:off x="790576" y="1733550"/>
+            <a:off x="552451" y="1733550"/>
             <a:ext cx="4953000" cy="3390900"/>
           </a:xfrm>
           <a:prstGeom prst="rect">
@@ -5485,7 +5560,7 @@
         </p:nvSpPr>
         <p:spPr>
           <a:xfrm>
-            <a:off x="6448426" y="1733550"/>
+            <a:off x="6686549" y="1733550"/>
             <a:ext cx="4953000" cy="3390900"/>
           </a:xfrm>
           <a:prstGeom prst="rect">
@@ -5527,10 +5602,10 @@
       </p:sp>
       <p:sp>
         <p:nvSpPr>
-          <p:cNvPr id="7" name="Szövegdoboz 6">
-            <a:extLst>
-              <a:ext uri="{FF2B5EF4-FFF2-40B4-BE49-F238E27FC236}">
-                <a16:creationId xmlns:a16="http://schemas.microsoft.com/office/drawing/2014/main" id="{DD58F758-F945-A1AD-0DAD-9CC1025AB0AF}"/>
+          <p:cNvPr id="2" name="Szövegdoboz 1">
+            <a:extLst>
+              <a:ext uri="{FF2B5EF4-FFF2-40B4-BE49-F238E27FC236}">
+                <a16:creationId xmlns:a16="http://schemas.microsoft.com/office/drawing/2014/main" id="{3C77CAE7-AE76-583D-2A1D-538EE9F1F155}"/>
               </a:ext>
             </a:extLst>
           </p:cNvPr>
@@ -5539,8 +5614,8 @@
         </p:nvSpPr>
         <p:spPr>
           <a:xfrm>
-            <a:off x="1533525" y="5229225"/>
-            <a:ext cx="3248025" cy="369332"/>
+            <a:off x="1773133" y="5699164"/>
+            <a:ext cx="2924174" cy="923330"/>
           </a:xfrm>
           <a:prstGeom prst="rect">
             <a:avLst/>
@@ -5553,19 +5628,24 @@
           </a:bodyPr>
           <a:lstStyle/>
           <a:p>
-            <a:r>
-              <a:rPr lang="hu-HU" dirty="0"/>
-              <a:t>Kép leírás</a:t>
-            </a:r>
-          </a:p>
-        </p:txBody>
-      </p:sp>
-      <p:sp>
-        <p:nvSpPr>
-          <p:cNvPr id="8" name="Szövegdoboz 7">
-            <a:extLst>
-              <a:ext uri="{FF2B5EF4-FFF2-40B4-BE49-F238E27FC236}">
-                <a16:creationId xmlns:a16="http://schemas.microsoft.com/office/drawing/2014/main" id="{77C1530C-356A-B77B-0449-74AF80F04911}"/>
+            <a:pPr algn="ctr"/>
+            <a:r>
+              <a:rPr lang="hu-HU" dirty="0">
+                <a:solidFill>
+                  <a:schemeClr val="bg1"/>
+                </a:solidFill>
+              </a:rPr>
+              <a:t>Tantárgycsoportok a Mérnökinformatikus szak tekintetében</a:t>
+            </a:r>
+          </a:p>
+        </p:txBody>
+      </p:sp>
+      <p:sp>
+        <p:nvSpPr>
+          <p:cNvPr id="6" name="Szövegdoboz 5">
+            <a:extLst>
+              <a:ext uri="{FF2B5EF4-FFF2-40B4-BE49-F238E27FC236}">
+                <a16:creationId xmlns:a16="http://schemas.microsoft.com/office/drawing/2014/main" id="{02E2E442-2FD0-4F8E-B057-4B25DAC56B84}"/>
               </a:ext>
             </a:extLst>
           </p:cNvPr>
@@ -5574,8 +5654,8 @@
         </p:nvSpPr>
         <p:spPr>
           <a:xfrm>
-            <a:off x="7143750" y="5236607"/>
-            <a:ext cx="3248025" cy="369332"/>
+            <a:off x="8191499" y="5699164"/>
+            <a:ext cx="1943100" cy="369332"/>
           </a:xfrm>
           <a:prstGeom prst="rect">
             <a:avLst/>
@@ -5588,13 +5668,48 @@
           </a:bodyPr>
           <a:lstStyle/>
           <a:p>
-            <a:r>
-              <a:rPr lang="hu-HU" dirty="0"/>
-              <a:t>Kép leírás</a:t>
-            </a:r>
-          </a:p>
-        </p:txBody>
-      </p:sp>
+            <a:pPr algn="ctr"/>
+            <a:r>
+              <a:rPr lang="hu-HU" dirty="0">
+                <a:solidFill>
+                  <a:schemeClr val="bg1"/>
+                </a:solidFill>
+              </a:rPr>
+              <a:t>Fórum Főoldal</a:t>
+            </a:r>
+          </a:p>
+        </p:txBody>
+      </p:sp>
+      <p:pic>
+        <p:nvPicPr>
+          <p:cNvPr id="12" name="Kép 11">
+            <a:extLst>
+              <a:ext uri="{FF2B5EF4-FFF2-40B4-BE49-F238E27FC236}">
+                <a16:creationId xmlns:a16="http://schemas.microsoft.com/office/drawing/2014/main" id="{CE4062E3-303F-A134-A354-A0386613D495}"/>
+              </a:ext>
+            </a:extLst>
+          </p:cNvPr>
+          <p:cNvPicPr>
+            <a:picLocks noChangeAspect="1"/>
+          </p:cNvPicPr>
+          <p:nvPr/>
+        </p:nvPicPr>
+        <p:blipFill>
+          <a:blip r:embed="rId2"/>
+          <a:stretch>
+            <a:fillRect/>
+          </a:stretch>
+        </p:blipFill>
+        <p:spPr>
+          <a:xfrm>
+            <a:off x="374440" y="1615559"/>
+            <a:ext cx="5721560" cy="4083605"/>
+          </a:xfrm>
+          <a:prstGeom prst="rect">
+            <a:avLst/>
+          </a:prstGeom>
+        </p:spPr>
+      </p:pic>
     </p:spTree>
     <p:extLst>
       <p:ext uri="{BB962C8B-B14F-4D97-AF65-F5344CB8AC3E}">
